--- a/decks/day2/module-2-custom-rag.pptx
+++ b/decks/day2/module-2-custom-rag.pptx
@@ -3845,7 +3845,7 @@
                 <a:ea typeface="Calibri" pitchFamily="34" charset="-122"/>
                 <a:cs typeface="Calibri" pitchFamily="34" charset="-120"/>
               </a:rPr>
-              <a:t>Source IQ doesn't yet connect to</a:t>
+              <a:t>Source IQ doesn't yet connect</a:t>
             </a:r>
             <a:endParaRPr lang="en-US" sz="1500" dirty="0"/>
           </a:p>
@@ -8442,7 +8442,7 @@
                 <a:ea typeface="Calibri" pitchFamily="34" charset="-122"/>
                 <a:cs typeface="Calibri" pitchFamily="34" charset="-120"/>
               </a:rPr>
-              <a:t>Semantic ranker — the quiet weapon</a:t>
+              <a:t>Semantic ranker</a:t>
             </a:r>
             <a:endParaRPr lang="en-US" sz="2800" dirty="0"/>
           </a:p>
